--- a/docs/ppt/랩미팅_1023_수정.pptx
+++ b/docs/ppt/랩미팅_1023_수정.pptx
@@ -18,10 +18,10 @@
     <p:sldId id="263" r:id="rId13"/>
     <p:sldId id="264" r:id="rId14"/>
     <p:sldId id="265" r:id="rId15"/>
+    <p:sldId id="266" r:id="rId16"/>
+    <p:sldId id="267" r:id="rId17"/>
     <p:sldId id="268" r:id="rId18"/>
     <p:sldId id="269" r:id="rId19"/>
-    <p:sldId id="266" r:id="rId16"/>
-    <p:sldId id="267" r:id="rId17"/>
     <p:sldId id="270" r:id="rId20"/>
   </p:sldIdLst>
   <p:sldSz cy="5143500" cx="9144000"/>

--- a/docs/ppt/랩미팅_1023_수정.pptx
+++ b/docs/ppt/랩미팅_1023_수정.pptx
@@ -23,6 +23,7 @@
     <p:sldId id="268" r:id="rId18"/>
     <p:sldId id="269" r:id="rId19"/>
     <p:sldId id="270" r:id="rId20"/>
+    <p:sldId id="271" r:id="rId21"/>
   </p:sldIdLst>
   <p:sldSz cy="5143500" cx="9144000"/>
   <p:notesSz cx="6858000" cy="9144000"/>
@@ -8022,43 +8023,14 @@
           <a:p>
             <a:r>
               <a:rPr b="1" sz="1520"/>
-              <a:t>seed 안정성: 시정촌 단위 대 픽셀 단위 (seed 0~4)</a:t>
-            </a:r>
-          </a:p>
-        </p:txBody>
-      </p:sp>
-      <p:sp>
-        <p:nvSpPr>
-          <p:cNvPr id="3" name="TextBox 2"/>
-          <p:cNvSpPr txBox="1"/>
-          <p:nvPr/>
-        </p:nvSpPr>
-        <p:spPr>
-          <a:xfrm>
-            <a:off x="150000" y="540000"/>
-            <a:ext cx="5000000" cy="300000"/>
-          </a:xfrm>
-          <a:prstGeom prst="rect">
-            <a:avLst/>
-          </a:prstGeom>
-          <a:noFill/>
-        </p:spPr>
-        <p:txBody>
-          <a:bodyPr wrap="square">
-            <a:spAutoFit/>
-          </a:bodyPr>
-          <a:lstStyle/>
-          <a:p>
-            <a:r>
-              <a:rPr sz="1100" b="1"/>
-              <a:t>① 전체 AUC가 seed마다 얼마나 흔들리나</a:t>
+              <a:t>seed별로 본 결과: 어떤 실험이 가장 좋은가 (전체 AUC)</a:t>
             </a:r>
           </a:p>
         </p:txBody>
       </p:sp>
       <p:pic>
         <p:nvPicPr>
-          <p:cNvPr id="4" name="Picture 3" descr="seed_stab.png"/>
+          <p:cNvPr id="3" name="Picture 2" descr="seedtab.png"/>
           <p:cNvPicPr>
             <a:picLocks noChangeAspect="1"/>
           </p:cNvPicPr>
@@ -8072,8 +8044,8 @@
         </p:blipFill>
         <p:spPr>
           <a:xfrm>
-            <a:off x="150000" y="830000"/>
-            <a:ext cx="5250000" cy="2467500"/>
+            <a:off x="150000" y="620000"/>
+            <a:ext cx="5650000" cy="3158863"/>
           </a:xfrm>
           <a:prstGeom prst="rect">
             <a:avLst/>
@@ -8082,14 +8054,14 @@
       </p:pic>
       <p:sp>
         <p:nvSpPr>
-          <p:cNvPr id="5" name="TextBox 4"/>
+          <p:cNvPr id="4" name="TextBox 3"/>
           <p:cNvSpPr txBox="1"/>
           <p:nvPr/>
         </p:nvSpPr>
         <p:spPr>
           <a:xfrm>
-            <a:off x="5550000" y="540000"/>
-            <a:ext cx="3450000" cy="300000"/>
+            <a:off x="5900000" y="650000"/>
+            <a:ext cx="3150000" cy="3500000"/>
           </a:xfrm>
           <a:prstGeom prst="rect">
             <a:avLst/>
@@ -8104,45 +8076,91 @@
           <a:p>
             <a:r>
               <a:rPr sz="1100" b="1"/>
-              <a:t>② 시정촌 확률 순서가 seed끼리 얼마나 같나</a:t>
+              <a:t>시정촌 단위</a:t>
+            </a:r>
+          </a:p>
+          <a:p>
+            <a:pPr>
+              <a:spcBef>
+                <a:spcPts val="300"/>
+              </a:spcBef>
+            </a:pPr>
+            <a:r>
+              <a:rPr sz="1000" b="0"/>
+              <a:t>SOFTU_분산만이 seed 5개 모두 1등 (평균 0.751)</a:t>
+            </a:r>
+          </a:p>
+          <a:p>
+            <a:pPr>
+              <a:spcBef>
+                <a:spcPts val="1200"/>
+              </a:spcBef>
+            </a:pPr>
+            <a:r>
+              <a:rPr sz="1100" b="1"/>
+              <a:t>픽셀 단위</a:t>
+            </a:r>
+          </a:p>
+          <a:p>
+            <a:pPr>
+              <a:spcBef>
+                <a:spcPts val="300"/>
+              </a:spcBef>
+            </a:pPr>
+            <a:r>
+              <a:rPr sz="1000" b="0"/>
+              <a:t>seed마다 1등이 바뀜 (SOFTU_끄기만 2번, LOCALU 2번, SOFTU_분산만 1번)</a:t>
+            </a:r>
+          </a:p>
+          <a:p>
+            <a:pPr>
+              <a:spcBef>
+                <a:spcPts val="300"/>
+              </a:spcBef>
+            </a:pPr>
+            <a:r>
+              <a:rPr sz="1000" b="0"/>
+              <a:t>LOCALU가 평균(0.808)과 가장 나쁜 seed(0.795) 모두 가장 높음</a:t>
+            </a:r>
+          </a:p>
+          <a:p>
+            <a:pPr>
+              <a:spcBef>
+                <a:spcPts val="300"/>
+              </a:spcBef>
+            </a:pPr>
+            <a:r>
+              <a:rPr sz="1000" b="0"/>
+              <a:t>LOCALU의 가장 나쁜 seed(0.795)도 시정촌 실험의 가장 좋은 seed(0.777)보다 높음</a:t>
+            </a:r>
+          </a:p>
+          <a:p>
+            <a:pPr>
+              <a:spcBef>
+                <a:spcPts val="1200"/>
+              </a:spcBef>
+            </a:pPr>
+            <a:r>
+              <a:rPr sz="900" b="0">
+                <a:solidFill>
+                  <a:srgbClr val="5B6577"/>
+                </a:solidFill>
+              </a:rPr>
+              <a:t>다만 LOCALU와 SOFTU_끄기만의 평균 차이(0.012)는 seed 흔들림 안이라, "가장 안정적으로 높다"고 말하는 것이 맞음</a:t>
             </a:r>
           </a:p>
         </p:txBody>
       </p:sp>
-      <p:pic>
-        <p:nvPicPr>
-          <p:cNvPr id="6" name="Picture 5" descr="rho.png"/>
-          <p:cNvPicPr>
-            <a:picLocks noChangeAspect="1"/>
-          </p:cNvPicPr>
-          <p:nvPr/>
-        </p:nvPicPr>
-        <p:blipFill>
-          <a:blip r:embed="rId3"/>
-          <a:stretch>
-            <a:fillRect/>
-          </a:stretch>
-        </p:blipFill>
-        <p:spPr>
-          <a:xfrm>
-            <a:off x="5550000" y="830000"/>
-            <a:ext cx="3450000" cy="1487333"/>
-          </a:xfrm>
-          <a:prstGeom prst="rect">
-            <a:avLst/>
-          </a:prstGeom>
-        </p:spPr>
-      </p:pic>
-      <p:sp>
-        <p:nvSpPr>
-          <p:cNvPr id="7" name="TextBox 6"/>
+      <p:sp>
+        <p:nvSpPr>
+          <p:cNvPr id="5" name="TextBox 4"/>
           <p:cNvSpPr txBox="1"/>
           <p:nvPr/>
         </p:nvSpPr>
         <p:spPr>
           <a:xfrm>
-            <a:off x="5550000" y="2560000"/>
-            <a:ext cx="3450000" cy="1400000"/>
+            <a:off x="500000" y="4450000"/>
+            <a:ext cx="8144000" cy="450000"/>
           </a:xfrm>
           <a:prstGeom prst="rect">
             <a:avLst/>
@@ -8155,97 +8173,6 @@
           </a:bodyPr>
           <a:lstStyle/>
           <a:p>
-            <a:r>
-              <a:rPr sz="950" b="0"/>
-              <a:t>확률 값 자체는 둘 다 seed마다 크게 흔들림</a:t>
-            </a:r>
-          </a:p>
-          <a:p>
-            <a:pPr>
-              <a:spcBef>
-                <a:spcPts val="300"/>
-              </a:spcBef>
-            </a:pPr>
-            <a:r>
-              <a:rPr sz="950" b="0"/>
-              <a:t>산사태 순서는 픽셀이 더 일정 (DN 0.08 대 0.59, SOFTU_끄기만 0.37 대 0.79)</a:t>
-            </a:r>
-          </a:p>
-          <a:p>
-            <a:pPr>
-              <a:spcBef>
-                <a:spcPts val="300"/>
-              </a:spcBef>
-            </a:pPr>
-            <a:r>
-              <a:rPr sz="950" b="0"/>
-              <a:t>액상화 순서는 비슷 (0.69~0.89)</a:t>
-            </a:r>
-          </a:p>
-        </p:txBody>
-      </p:sp>
-      <p:sp>
-        <p:nvSpPr>
-          <p:cNvPr id="8" name="TextBox 7"/>
-          <p:cNvSpPr txBox="1"/>
-          <p:nvPr/>
-        </p:nvSpPr>
-        <p:spPr>
-          <a:xfrm>
-            <a:off x="150000" y="3700000"/>
-            <a:ext cx="5300000" cy="800000"/>
-          </a:xfrm>
-          <a:prstGeom prst="rect">
-            <a:avLst/>
-          </a:prstGeom>
-          <a:noFill/>
-        </p:spPr>
-        <p:txBody>
-          <a:bodyPr wrap="square">
-            <a:spAutoFit/>
-          </a:bodyPr>
-          <a:lstStyle/>
-          <a:p>
-            <a:r>
-              <a:rPr sz="950" b="0"/>
-              <a:t>SOFTU · LOCALU는 픽셀에서 AUC 폭이 작음 (0.008 · 0.032)</a:t>
-            </a:r>
-          </a:p>
-          <a:p>
-            <a:pPr>
-              <a:spcBef>
-                <a:spcPts val="300"/>
-              </a:spcBef>
-            </a:pPr>
-            <a:r>
-              <a:rPr sz="950" b="0"/>
-              <a:t>SOFTU_분산만은 픽셀에서 폭이 큼 (0.181): seed 0에서 노토 액상화가 0.35로 무너짐</a:t>
-            </a:r>
-          </a:p>
-        </p:txBody>
-      </p:sp>
-      <p:sp>
-        <p:nvSpPr>
-          <p:cNvPr id="9" name="TextBox 8"/>
-          <p:cNvSpPr txBox="1"/>
-          <p:nvPr/>
-        </p:nvSpPr>
-        <p:spPr>
-          <a:xfrm>
-            <a:off x="700000" y="4520000"/>
-            <a:ext cx="7700000" cy="450000"/>
-          </a:xfrm>
-          <a:prstGeom prst="rect">
-            <a:avLst/>
-          </a:prstGeom>
-          <a:noFill/>
-        </p:spPr>
-        <p:txBody>
-          <a:bodyPr wrap="square">
-            <a:spAutoFit/>
-          </a:bodyPr>
-          <a:lstStyle/>
-          <a:p>
             <a:pPr algn="ctr"/>
             <a:r>
               <a:rPr sz="1000" b="1">
@@ -8253,7 +8180,7 @@
                   <a:srgbClr val="A4C2F4"/>
                 </a:highlight>
               </a:rPr>
-              <a:t>픽셀 단위는 산사태 순서가 더 일정하고, 끄기와 분산을 같이 쓰면(SOFTU · LOCALU) AUC도 seed에 거의 안 흔들림</a:t>
+              <a:t>최종: 픽셀 단위 LOCALU (평균 0.808, 가장 나쁜 seed 0.795). 아직 USGS 기준선(0.854)보다는 낮음</a:t>
             </a:r>
           </a:p>
         </p:txBody>
@@ -8298,6 +8225,282 @@
           <a:p>
             <a:r>
               <a:rPr b="1" sz="1520"/>
+              <a:t>seed 안정성: 시정촌 단위 대 픽셀 단위 (seed 0~4)</a:t>
+            </a:r>
+          </a:p>
+        </p:txBody>
+      </p:sp>
+      <p:sp>
+        <p:nvSpPr>
+          <p:cNvPr id="3" name="TextBox 2"/>
+          <p:cNvSpPr txBox="1"/>
+          <p:nvPr/>
+        </p:nvSpPr>
+        <p:spPr>
+          <a:xfrm>
+            <a:off x="150000" y="540000"/>
+            <a:ext cx="5000000" cy="300000"/>
+          </a:xfrm>
+          <a:prstGeom prst="rect">
+            <a:avLst/>
+          </a:prstGeom>
+          <a:noFill/>
+        </p:spPr>
+        <p:txBody>
+          <a:bodyPr wrap="square">
+            <a:spAutoFit/>
+          </a:bodyPr>
+          <a:lstStyle/>
+          <a:p>
+            <a:r>
+              <a:rPr sz="1100" b="1"/>
+              <a:t>① 전체 AUC가 seed마다 얼마나 흔들리나</a:t>
+            </a:r>
+          </a:p>
+        </p:txBody>
+      </p:sp>
+      <p:pic>
+        <p:nvPicPr>
+          <p:cNvPr id="4" name="Picture 3" descr="seed_stab.png"/>
+          <p:cNvPicPr>
+            <a:picLocks noChangeAspect="1"/>
+          </p:cNvPicPr>
+          <p:nvPr/>
+        </p:nvPicPr>
+        <p:blipFill>
+          <a:blip r:embed="rId2"/>
+          <a:stretch>
+            <a:fillRect/>
+          </a:stretch>
+        </p:blipFill>
+        <p:spPr>
+          <a:xfrm>
+            <a:off x="150000" y="830000"/>
+            <a:ext cx="5250000" cy="2467500"/>
+          </a:xfrm>
+          <a:prstGeom prst="rect">
+            <a:avLst/>
+          </a:prstGeom>
+        </p:spPr>
+      </p:pic>
+      <p:sp>
+        <p:nvSpPr>
+          <p:cNvPr id="5" name="TextBox 4"/>
+          <p:cNvSpPr txBox="1"/>
+          <p:nvPr/>
+        </p:nvSpPr>
+        <p:spPr>
+          <a:xfrm>
+            <a:off x="5550000" y="540000"/>
+            <a:ext cx="3450000" cy="300000"/>
+          </a:xfrm>
+          <a:prstGeom prst="rect">
+            <a:avLst/>
+          </a:prstGeom>
+          <a:noFill/>
+        </p:spPr>
+        <p:txBody>
+          <a:bodyPr wrap="square">
+            <a:spAutoFit/>
+          </a:bodyPr>
+          <a:lstStyle/>
+          <a:p>
+            <a:r>
+              <a:rPr sz="1100" b="1"/>
+              <a:t>② 시정촌 확률 순서가 seed끼리 얼마나 같나</a:t>
+            </a:r>
+          </a:p>
+        </p:txBody>
+      </p:sp>
+      <p:pic>
+        <p:nvPicPr>
+          <p:cNvPr id="6" name="Picture 5" descr="rho.png"/>
+          <p:cNvPicPr>
+            <a:picLocks noChangeAspect="1"/>
+          </p:cNvPicPr>
+          <p:nvPr/>
+        </p:nvPicPr>
+        <p:blipFill>
+          <a:blip r:embed="rId3"/>
+          <a:stretch>
+            <a:fillRect/>
+          </a:stretch>
+        </p:blipFill>
+        <p:spPr>
+          <a:xfrm>
+            <a:off x="5550000" y="830000"/>
+            <a:ext cx="3450000" cy="1487333"/>
+          </a:xfrm>
+          <a:prstGeom prst="rect">
+            <a:avLst/>
+          </a:prstGeom>
+        </p:spPr>
+      </p:pic>
+      <p:sp>
+        <p:nvSpPr>
+          <p:cNvPr id="7" name="TextBox 6"/>
+          <p:cNvSpPr txBox="1"/>
+          <p:nvPr/>
+        </p:nvSpPr>
+        <p:spPr>
+          <a:xfrm>
+            <a:off x="5550000" y="2560000"/>
+            <a:ext cx="3450000" cy="1400000"/>
+          </a:xfrm>
+          <a:prstGeom prst="rect">
+            <a:avLst/>
+          </a:prstGeom>
+          <a:noFill/>
+        </p:spPr>
+        <p:txBody>
+          <a:bodyPr wrap="square">
+            <a:spAutoFit/>
+          </a:bodyPr>
+          <a:lstStyle/>
+          <a:p>
+            <a:r>
+              <a:rPr sz="950" b="0"/>
+              <a:t>확률 값 자체는 둘 다 seed마다 크게 흔들림</a:t>
+            </a:r>
+          </a:p>
+          <a:p>
+            <a:pPr>
+              <a:spcBef>
+                <a:spcPts val="300"/>
+              </a:spcBef>
+            </a:pPr>
+            <a:r>
+              <a:rPr sz="950" b="0"/>
+              <a:t>산사태 순서는 픽셀이 더 일정 (DN 0.08 대 0.59, SOFTU_끄기만 0.37 대 0.79)</a:t>
+            </a:r>
+          </a:p>
+          <a:p>
+            <a:pPr>
+              <a:spcBef>
+                <a:spcPts val="300"/>
+              </a:spcBef>
+            </a:pPr>
+            <a:r>
+              <a:rPr sz="950" b="0"/>
+              <a:t>액상화 순서는 비슷 (0.69~0.89)</a:t>
+            </a:r>
+          </a:p>
+        </p:txBody>
+      </p:sp>
+      <p:sp>
+        <p:nvSpPr>
+          <p:cNvPr id="8" name="TextBox 7"/>
+          <p:cNvSpPr txBox="1"/>
+          <p:nvPr/>
+        </p:nvSpPr>
+        <p:spPr>
+          <a:xfrm>
+            <a:off x="150000" y="3700000"/>
+            <a:ext cx="5300000" cy="800000"/>
+          </a:xfrm>
+          <a:prstGeom prst="rect">
+            <a:avLst/>
+          </a:prstGeom>
+          <a:noFill/>
+        </p:spPr>
+        <p:txBody>
+          <a:bodyPr wrap="square">
+            <a:spAutoFit/>
+          </a:bodyPr>
+          <a:lstStyle/>
+          <a:p>
+            <a:r>
+              <a:rPr sz="950" b="0"/>
+              <a:t>SOFTU · LOCALU는 픽셀에서 AUC 폭이 작음 (0.008 · 0.032)</a:t>
+            </a:r>
+          </a:p>
+          <a:p>
+            <a:pPr>
+              <a:spcBef>
+                <a:spcPts val="300"/>
+              </a:spcBef>
+            </a:pPr>
+            <a:r>
+              <a:rPr sz="950" b="0"/>
+              <a:t>SOFTU_분산만은 픽셀에서 폭이 큼 (0.181): seed 0에서 노토 액상화가 0.35로 무너짐</a:t>
+            </a:r>
+          </a:p>
+        </p:txBody>
+      </p:sp>
+      <p:sp>
+        <p:nvSpPr>
+          <p:cNvPr id="9" name="TextBox 8"/>
+          <p:cNvSpPr txBox="1"/>
+          <p:nvPr/>
+        </p:nvSpPr>
+        <p:spPr>
+          <a:xfrm>
+            <a:off x="700000" y="4520000"/>
+            <a:ext cx="7700000" cy="450000"/>
+          </a:xfrm>
+          <a:prstGeom prst="rect">
+            <a:avLst/>
+          </a:prstGeom>
+          <a:noFill/>
+        </p:spPr>
+        <p:txBody>
+          <a:bodyPr wrap="square">
+            <a:spAutoFit/>
+          </a:bodyPr>
+          <a:lstStyle/>
+          <a:p>
+            <a:pPr algn="ctr"/>
+            <a:r>
+              <a:rPr sz="1000" b="1">
+                <a:highlight>
+                  <a:srgbClr val="A4C2F4"/>
+                </a:highlight>
+              </a:rPr>
+              <a:t>픽셀 단위는 산사태 순서가 더 일정하고, 끄기와 분산을 같이 쓰면(SOFTU · LOCALU) AUC도 seed에 거의 안 흔들림</a:t>
+            </a:r>
+          </a:p>
+        </p:txBody>
+      </p:sp>
+    </p:spTree>
+  </p:cSld>
+  <p:clrMapOvr>
+    <a:masterClrMapping/>
+  </p:clrMapOvr>
+</p:sld>
+</file>
+
+<file path=ppt/slides/slide16.xml><?xml version="1.0" encoding="utf-8"?>
+<p:sld xmlns:a="http://schemas.openxmlformats.org/drawingml/2006/main" xmlns:p="http://schemas.openxmlformats.org/presentationml/2006/main" xmlns:r="http://schemas.openxmlformats.org/officeDocument/2006/relationships">
+  <p:cSld>
+    <p:spTree>
+      <p:nvGrpSpPr>
+        <p:cNvPr id="1" name=""/>
+        <p:cNvGrpSpPr/>
+        <p:nvPr/>
+      </p:nvGrpSpPr>
+      <p:grpSpPr/>
+      <p:sp>
+        <p:nvSpPr>
+          <p:cNvPr id="2" name="Title 1"/>
+          <p:cNvSpPr>
+            <a:spLocks noGrp="1"/>
+          </p:cNvSpPr>
+          <p:nvPr>
+            <p:ph type="title"/>
+          </p:nvPr>
+        </p:nvSpPr>
+        <p:spPr>
+          <a:xfrm>
+            <a:off x="0" y="0"/>
+            <a:ext cx="8520600" cy="572700"/>
+          </a:xfrm>
+        </p:spPr>
+        <p:txBody>
+          <a:bodyPr/>
+          <a:lstStyle/>
+          <a:p>
+            <a:r>
+              <a:rPr b="1" sz="1520"/>
               <a:t>정리</a:t>
             </a:r>
           </a:p>
@@ -8474,6 +8677,17 @@
           <a:p>
             <a:r>
               <a:rPr sz="1000" b="0"/>
+              <a:t>· seed 5개 모두 SOFTU_분산만이 1등</a:t>
+            </a:r>
+          </a:p>
+          <a:p>
+            <a:pPr>
+              <a:spcBef>
+                <a:spcPts val="400"/>
+              </a:spcBef>
+            </a:pPr>
+            <a:r>
+              <a:rPr sz="1000" b="0"/>
               <a:t>· BD를 빼면 네 실험 모두 오름</a:t>
             </a:r>
           </a:p>
@@ -8485,7 +8699,7 @@
             </a:pPr>
             <a:r>
               <a:rPr sz="1000" b="0"/>
-              <a:t>· USGS 불확실도의 효과는 대부분 분산에서 옴, 끄기는 작음</a:t>
+              <a:t>· USGS 불확실도의 효과는 대부분 분산에서 옴</a:t>
             </a:r>
           </a:p>
         </p:txBody>
@@ -8683,7 +8897,7 @@
             </a:pPr>
             <a:r>
               <a:rPr sz="1000" b="0"/>
-              <a:t>· SOFTU · LOCALU는 seed에 거의 안 흔들림</a:t>
+              <a:t>· 가장 나쁜 seed도 0.795: 시정촌의 가장 좋은 seed(0.777)보다 높음</a:t>
             </a:r>
           </a:p>
         </p:txBody>
